--- a/curriculum/M01/W04/L01/slides.pptx
+++ b/curriculum/M01/W04/L01/slides.pptx
@@ -7118,11 +7118,69 @@
                 <a:ea typeface="Malgun Gothic"/>
                 <a:cs typeface="Malgun Gothic"/>
               </a:rPr>
-              <a:t>1. 중간엽이 연골 모형을 만든다. 2. 모형 가운데의 연골세포가 비대해지고 주변 기질이 무기질화되며 연골세포가 사멸한다. 3. 혈관이 침입하고 osteoblast가 따라 들어와 </a:t>
-            </a:r>
+              <a:t>1. 중간엽이 연골 모형을 만든다.</a:t>
+            </a:r>
+          </a:p>
+          <a:p>
+            <a:pPr>
+              <a:spcAft>
+                <a:spcPts val="900"/>
+              </a:spcAft>
+            </a:pPr>
             <a:r>
               <a:rPr sz="1400" b="1" i="0">
                 <a:solidFill>
+                  <a:srgbClr val="F2B705"/>
+                </a:solidFill>
+                <a:latin typeface="Malgun Gothic"/>
+                <a:ea typeface="Malgun Gothic"/>
+                <a:cs typeface="Malgun Gothic"/>
+              </a:rPr>
+              <a:t>•  </a:t>
+            </a:r>
+            <a:r>
+              <a:rPr sz="1400" b="0" i="0">
+                <a:solidFill>
+                  <a:srgbClr val="11202B"/>
+                </a:solidFill>
+                <a:latin typeface="Malgun Gothic"/>
+                <a:ea typeface="Malgun Gothic"/>
+                <a:cs typeface="Malgun Gothic"/>
+              </a:rPr>
+              <a:t>2. 모형 가운데의 연골세포가 비대해지고 주변 기질이 무기질화되며 연골세포가 사멸한다.</a:t>
+            </a:r>
+          </a:p>
+          <a:p>
+            <a:pPr>
+              <a:spcAft>
+                <a:spcPts val="900"/>
+              </a:spcAft>
+            </a:pPr>
+            <a:r>
+              <a:rPr sz="1400" b="1" i="0">
+                <a:solidFill>
+                  <a:srgbClr val="F2B705"/>
+                </a:solidFill>
+                <a:latin typeface="Malgun Gothic"/>
+                <a:ea typeface="Malgun Gothic"/>
+                <a:cs typeface="Malgun Gothic"/>
+              </a:rPr>
+              <a:t>•  </a:t>
+            </a:r>
+            <a:r>
+              <a:rPr sz="1400" b="0" i="0">
+                <a:solidFill>
+                  <a:srgbClr val="11202B"/>
+                </a:solidFill>
+                <a:latin typeface="Malgun Gothic"/>
+                <a:ea typeface="Malgun Gothic"/>
+                <a:cs typeface="Malgun Gothic"/>
+              </a:rPr>
+              <a:t>3. 혈관이 침입하고 osteoblast가 따라 들어와 </a:t>
+            </a:r>
+            <a:r>
+              <a:rPr sz="1400" b="1" i="0">
+                <a:solidFill>
                   <a:srgbClr val="11202B"/>
                 </a:solidFill>
                 <a:latin typeface="Malgun Gothic"/>
@@ -7140,11 +7198,40 @@
                 <a:ea typeface="Malgun Gothic"/>
                 <a:cs typeface="Malgun Gothic"/>
               </a:rPr>
-              <a:t>을 만든다. 4. 출생 전후로 양 끝에 </a:t>
-            </a:r>
+              <a:t>을 만든다.</a:t>
+            </a:r>
+          </a:p>
+          <a:p>
+            <a:pPr>
+              <a:spcAft>
+                <a:spcPts val="900"/>
+              </a:spcAft>
+            </a:pPr>
             <a:r>
               <a:rPr sz="1400" b="1" i="0">
                 <a:solidFill>
+                  <a:srgbClr val="F2B705"/>
+                </a:solidFill>
+                <a:latin typeface="Malgun Gothic"/>
+                <a:ea typeface="Malgun Gothic"/>
+                <a:cs typeface="Malgun Gothic"/>
+              </a:rPr>
+              <a:t>•  </a:t>
+            </a:r>
+            <a:r>
+              <a:rPr sz="1400" b="0" i="0">
+                <a:solidFill>
+                  <a:srgbClr val="11202B"/>
+                </a:solidFill>
+                <a:latin typeface="Malgun Gothic"/>
+                <a:ea typeface="Malgun Gothic"/>
+                <a:cs typeface="Malgun Gothic"/>
+              </a:rPr>
+              <a:t>4. 출생 전후로 양 끝에 </a:t>
+            </a:r>
+            <a:r>
+              <a:rPr sz="1400" b="1" i="0">
+                <a:solidFill>
                   <a:srgbClr val="11202B"/>
                 </a:solidFill>
                 <a:latin typeface="Malgun Gothic"/>
@@ -7162,7 +7249,36 @@
                 <a:ea typeface="Malgun Gothic"/>
                 <a:cs typeface="Malgun Gothic"/>
               </a:rPr>
-              <a:t>이 생긴다. 5. 두 골화 중심 사이에 연골이 남아 </a:t>
+              <a:t>이 생긴다.</a:t>
+            </a:r>
+          </a:p>
+          <a:p>
+            <a:pPr>
+              <a:spcAft>
+                <a:spcPts val="900"/>
+              </a:spcAft>
+            </a:pPr>
+            <a:r>
+              <a:rPr sz="1400" b="1" i="0">
+                <a:solidFill>
+                  <a:srgbClr val="F2B705"/>
+                </a:solidFill>
+                <a:latin typeface="Malgun Gothic"/>
+                <a:ea typeface="Malgun Gothic"/>
+                <a:cs typeface="Malgun Gothic"/>
+              </a:rPr>
+              <a:t>•  </a:t>
+            </a:r>
+            <a:r>
+              <a:rPr sz="1400" b="0" i="0">
+                <a:solidFill>
+                  <a:srgbClr val="11202B"/>
+                </a:solidFill>
+                <a:latin typeface="Malgun Gothic"/>
+                <a:ea typeface="Malgun Gothic"/>
+                <a:cs typeface="Malgun Gothic"/>
+              </a:rPr>
+              <a:t>5. 두 골화 중심 사이에 연골이 남아 </a:t>
             </a:r>
             <a:r>
               <a:rPr sz="1400" b="1" i="0">
@@ -9874,51 +9990,7 @@
                 <a:ea typeface="Malgun Gothic"/>
                 <a:cs typeface="Malgun Gothic"/>
               </a:rPr>
-              <a:t>: 반복되는 하중으로 생긴 미세 균열을 그대로 두면 쌓여서 피로 골절이 된다. 2. </a:t>
-            </a:r>
-            <a:r>
-              <a:rPr sz="1400" b="1" i="0">
-                <a:solidFill>
-                  <a:srgbClr val="11202B"/>
-                </a:solidFill>
-                <a:latin typeface="Malgun Gothic"/>
-                <a:ea typeface="Malgun Gothic"/>
-                <a:cs typeface="Malgun Gothic"/>
-              </a:rPr>
-              <a:t>무기질의 동원</a:t>
-            </a:r>
-            <a:r>
-              <a:rPr sz="1400" b="0" i="0">
-                <a:solidFill>
-                  <a:srgbClr val="11202B"/>
-                </a:solidFill>
-                <a:latin typeface="Malgun Gothic"/>
-                <a:ea typeface="Malgun Gothic"/>
-                <a:cs typeface="Malgun Gothic"/>
-              </a:rPr>
-              <a:t>: 혈중 칼슘이 필요할 때 뼈에서 꺼내 쓴다. 3. </a:t>
-            </a:r>
-            <a:r>
-              <a:rPr sz="1400" b="1" i="0">
-                <a:solidFill>
-                  <a:srgbClr val="11202B"/>
-                </a:solidFill>
-                <a:latin typeface="Malgun Gothic"/>
-                <a:ea typeface="Malgun Gothic"/>
-                <a:cs typeface="Malgun Gothic"/>
-              </a:rPr>
-              <a:t>구조의 최적화</a:t>
-            </a:r>
-            <a:r>
-              <a:rPr sz="1400" b="0" i="0">
-                <a:solidFill>
-                  <a:srgbClr val="11202B"/>
-                </a:solidFill>
-                <a:latin typeface="Malgun Gothic"/>
-                <a:ea typeface="Malgun Gothic"/>
-                <a:cs typeface="Malgun Gothic"/>
-              </a:rPr>
-              <a:t>: 하중의 분포가 바뀌면 그에 맞게 배열을 조정한다.</a:t>
+              <a:t>: 반복되는 하중으로 생긴 미세 균열을 그대로 두면 쌓여서 피로 골절이 된다.</a:t>
             </a:r>
           </a:p>
           <a:p>
@@ -9939,6 +10011,17 @@
               <a:t>•  </a:t>
             </a:r>
             <a:r>
+              <a:rPr sz="1400" b="0" i="0">
+                <a:solidFill>
+                  <a:srgbClr val="11202B"/>
+                </a:solidFill>
+                <a:latin typeface="Malgun Gothic"/>
+                <a:ea typeface="Malgun Gothic"/>
+                <a:cs typeface="Malgun Gothic"/>
+              </a:rPr>
+              <a:t>2. </a:t>
+            </a:r>
+            <a:r>
               <a:rPr sz="1400" b="1" i="0">
                 <a:solidFill>
                   <a:srgbClr val="11202B"/>
@@ -9947,7 +10030,7 @@
                 <a:ea typeface="Malgun Gothic"/>
                 <a:cs typeface="Malgun Gothic"/>
               </a:rPr>
-              <a:t>기본 다세포 단위(BMU).</a:t>
+              <a:t>무기질의 동원</a:t>
             </a:r>
             <a:r>
               <a:rPr sz="1400" b="0" i="0">
@@ -9958,7 +10041,7 @@
                 <a:ea typeface="Malgun Gothic"/>
                 <a:cs typeface="Malgun Gothic"/>
               </a:rPr>
-              <a:t> 재형성은 osteoclast와 osteoblast가 한 팀을 이루어 한 자리에서 순서대로 작업하는 방식으로 일어난다. 순서가 정해져 있다.</a:t>
+              <a:t>: 혈중 칼슘이 필요할 때 뼈에서 꺼내 쓴다.</a:t>
             </a:r>
           </a:p>
           <a:p>
@@ -9987,6 +10070,97 @@
                 <a:ea typeface="Malgun Gothic"/>
                 <a:cs typeface="Malgun Gothic"/>
               </a:rPr>
+              <a:t>3. </a:t>
+            </a:r>
+            <a:r>
+              <a:rPr sz="1400" b="1" i="0">
+                <a:solidFill>
+                  <a:srgbClr val="11202B"/>
+                </a:solidFill>
+                <a:latin typeface="Malgun Gothic"/>
+                <a:ea typeface="Malgun Gothic"/>
+                <a:cs typeface="Malgun Gothic"/>
+              </a:rPr>
+              <a:t>구조의 최적화</a:t>
+            </a:r>
+            <a:r>
+              <a:rPr sz="1400" b="0" i="0">
+                <a:solidFill>
+                  <a:srgbClr val="11202B"/>
+                </a:solidFill>
+                <a:latin typeface="Malgun Gothic"/>
+                <a:ea typeface="Malgun Gothic"/>
+                <a:cs typeface="Malgun Gothic"/>
+              </a:rPr>
+              <a:t>: 하중의 분포가 바뀌면 그에 맞게 배열을 조정한다.</a:t>
+            </a:r>
+          </a:p>
+          <a:p>
+            <a:pPr>
+              <a:spcAft>
+                <a:spcPts val="900"/>
+              </a:spcAft>
+            </a:pPr>
+            <a:r>
+              <a:rPr sz="1400" b="1" i="0">
+                <a:solidFill>
+                  <a:srgbClr val="F2B705"/>
+                </a:solidFill>
+                <a:latin typeface="Malgun Gothic"/>
+                <a:ea typeface="Malgun Gothic"/>
+                <a:cs typeface="Malgun Gothic"/>
+              </a:rPr>
+              <a:t>•  </a:t>
+            </a:r>
+            <a:r>
+              <a:rPr sz="1400" b="1" i="0">
+                <a:solidFill>
+                  <a:srgbClr val="11202B"/>
+                </a:solidFill>
+                <a:latin typeface="Malgun Gothic"/>
+                <a:ea typeface="Malgun Gothic"/>
+                <a:cs typeface="Malgun Gothic"/>
+              </a:rPr>
+              <a:t>기본 다세포 단위(BMU).</a:t>
+            </a:r>
+            <a:r>
+              <a:rPr sz="1400" b="0" i="0">
+                <a:solidFill>
+                  <a:srgbClr val="11202B"/>
+                </a:solidFill>
+                <a:latin typeface="Malgun Gothic"/>
+                <a:ea typeface="Malgun Gothic"/>
+                <a:cs typeface="Malgun Gothic"/>
+              </a:rPr>
+              <a:t> 재형성은 osteoclast와 osteoblast가 한 팀을 이루어 한 자리에서 순서대로 작업하는 방식으로 일어난다. 순서가 정해져 있다.</a:t>
+            </a:r>
+          </a:p>
+          <a:p>
+            <a:pPr>
+              <a:spcAft>
+                <a:spcPts val="900"/>
+              </a:spcAft>
+            </a:pPr>
+            <a:r>
+              <a:rPr sz="1400" b="1" i="0">
+                <a:solidFill>
+                  <a:srgbClr val="F2B705"/>
+                </a:solidFill>
+                <a:latin typeface="Malgun Gothic"/>
+                <a:ea typeface="Malgun Gothic"/>
+                <a:cs typeface="Malgun Gothic"/>
+              </a:rPr>
+              <a:t>•  </a:t>
+            </a:r>
+            <a:r>
+              <a:rPr sz="1400" b="0" i="0">
+                <a:solidFill>
+                  <a:srgbClr val="11202B"/>
+                </a:solidFill>
+                <a:latin typeface="Malgun Gothic"/>
+                <a:ea typeface="Malgun Gothic"/>
+                <a:cs typeface="Malgun Gothic"/>
+              </a:rPr>
               <a:t>1. </a:t>
             </a:r>
             <a:r>
@@ -10009,11 +10183,40 @@
                 <a:ea typeface="Malgun Gothic"/>
                 <a:cs typeface="Malgun Gothic"/>
               </a:rPr>
-              <a:t>: osteocyte가 미세 손상이나 신호를 감지하고 osteoclast 전구세포를 부른다. 2. </a:t>
-            </a:r>
+              <a:t>: osteocyte가 미세 손상이나 신호를 감지하고 osteoclast 전구세포를 부른다.</a:t>
+            </a:r>
+          </a:p>
+          <a:p>
+            <a:pPr>
+              <a:spcAft>
+                <a:spcPts val="900"/>
+              </a:spcAft>
+            </a:pPr>
             <a:r>
               <a:rPr sz="1400" b="1" i="0">
                 <a:solidFill>
+                  <a:srgbClr val="F2B705"/>
+                </a:solidFill>
+                <a:latin typeface="Malgun Gothic"/>
+                <a:ea typeface="Malgun Gothic"/>
+                <a:cs typeface="Malgun Gothic"/>
+              </a:rPr>
+              <a:t>•  </a:t>
+            </a:r>
+            <a:r>
+              <a:rPr sz="1400" b="0" i="0">
+                <a:solidFill>
+                  <a:srgbClr val="11202B"/>
+                </a:solidFill>
+                <a:latin typeface="Malgun Gothic"/>
+                <a:ea typeface="Malgun Gothic"/>
+                <a:cs typeface="Malgun Gothic"/>
+              </a:rPr>
+              <a:t>2. </a:t>
+            </a:r>
+            <a:r>
+              <a:rPr sz="1400" b="1" i="0">
+                <a:solidFill>
                   <a:srgbClr val="11202B"/>
                 </a:solidFill>
                 <a:latin typeface="Malgun Gothic"/>
@@ -10031,11 +10234,40 @@
                 <a:ea typeface="Malgun Gothic"/>
                 <a:cs typeface="Malgun Gothic"/>
               </a:rPr>
-              <a:t>: osteoclast가 약 2~3주에 걸쳐 뼈를 파낸다. 3. </a:t>
-            </a:r>
+              <a:t>: osteoclast가 약 2~3주에 걸쳐 뼈를 파낸다.</a:t>
+            </a:r>
+          </a:p>
+          <a:p>
+            <a:pPr>
+              <a:spcAft>
+                <a:spcPts val="900"/>
+              </a:spcAft>
+            </a:pPr>
             <a:r>
               <a:rPr sz="1400" b="1" i="0">
                 <a:solidFill>
+                  <a:srgbClr val="F2B705"/>
+                </a:solidFill>
+                <a:latin typeface="Malgun Gothic"/>
+                <a:ea typeface="Malgun Gothic"/>
+                <a:cs typeface="Malgun Gothic"/>
+              </a:rPr>
+              <a:t>•  </a:t>
+            </a:r>
+            <a:r>
+              <a:rPr sz="1400" b="0" i="0">
+                <a:solidFill>
+                  <a:srgbClr val="11202B"/>
+                </a:solidFill>
+                <a:latin typeface="Malgun Gothic"/>
+                <a:ea typeface="Malgun Gothic"/>
+                <a:cs typeface="Malgun Gothic"/>
+              </a:rPr>
+              <a:t>3. </a:t>
+            </a:r>
+            <a:r>
+              <a:rPr sz="1400" b="1" i="0">
+                <a:solidFill>
                   <a:srgbClr val="11202B"/>
                 </a:solidFill>
                 <a:latin typeface="Malgun Gothic"/>
@@ -10053,7 +10285,36 @@
                 <a:ea typeface="Malgun Gothic"/>
                 <a:cs typeface="Malgun Gothic"/>
               </a:rPr>
-              <a:t>: osteoclast가 사멸하고 osteoblast가 모인다. 4. </a:t>
+              <a:t>: osteoclast가 사멸하고 osteoblast가 모인다.</a:t>
+            </a:r>
+          </a:p>
+          <a:p>
+            <a:pPr>
+              <a:spcAft>
+                <a:spcPts val="900"/>
+              </a:spcAft>
+            </a:pPr>
+            <a:r>
+              <a:rPr sz="1400" b="1" i="0">
+                <a:solidFill>
+                  <a:srgbClr val="F2B705"/>
+                </a:solidFill>
+                <a:latin typeface="Malgun Gothic"/>
+                <a:ea typeface="Malgun Gothic"/>
+                <a:cs typeface="Malgun Gothic"/>
+              </a:rPr>
+              <a:t>•  </a:t>
+            </a:r>
+            <a:r>
+              <a:rPr sz="1400" b="0" i="0">
+                <a:solidFill>
+                  <a:srgbClr val="11202B"/>
+                </a:solidFill>
+                <a:latin typeface="Malgun Gothic"/>
+                <a:ea typeface="Malgun Gothic"/>
+                <a:cs typeface="Malgun Gothic"/>
+              </a:rPr>
+              <a:t>4. </a:t>
             </a:r>
             <a:r>
               <a:rPr sz="1400" b="1" i="0">
@@ -14591,11 +14852,40 @@
                 <a:ea typeface="Malgun Gothic"/>
                 <a:cs typeface="Malgun Gothic"/>
               </a:rPr>
-              <a:t>: 몸의 형태를 유지하고 중력에 맞선다. 2. </a:t>
-            </a:r>
+              <a:t>: 몸의 형태를 유지하고 중력에 맞선다.</a:t>
+            </a:r>
+          </a:p>
+          <a:p>
+            <a:pPr>
+              <a:spcAft>
+                <a:spcPts val="900"/>
+              </a:spcAft>
+            </a:pPr>
             <a:r>
               <a:rPr sz="1600" b="1" i="0">
                 <a:solidFill>
+                  <a:srgbClr val="F2B705"/>
+                </a:solidFill>
+                <a:latin typeface="Malgun Gothic"/>
+                <a:ea typeface="Malgun Gothic"/>
+                <a:cs typeface="Malgun Gothic"/>
+              </a:rPr>
+              <a:t>•  </a:t>
+            </a:r>
+            <a:r>
+              <a:rPr sz="1600" b="0" i="0">
+                <a:solidFill>
+                  <a:srgbClr val="11202B"/>
+                </a:solidFill>
+                <a:latin typeface="Malgun Gothic"/>
+                <a:ea typeface="Malgun Gothic"/>
+                <a:cs typeface="Malgun Gothic"/>
+              </a:rPr>
+              <a:t>2. </a:t>
+            </a:r>
+            <a:r>
+              <a:rPr sz="1600" b="1" i="0">
+                <a:solidFill>
                   <a:srgbClr val="11202B"/>
                 </a:solidFill>
                 <a:latin typeface="Malgun Gothic"/>
@@ -14613,11 +14903,40 @@
                 <a:ea typeface="Malgun Gothic"/>
                 <a:cs typeface="Malgun Gothic"/>
               </a:rPr>
-              <a:t>: 머리뼈가 뇌를, 갈비뼈가 심장과 폐를, 척추가 척수를 감싼다. 3. </a:t>
-            </a:r>
+              <a:t>: 머리뼈가 뇌를, 갈비뼈가 심장과 폐를, 척추가 척수를 감싼다.</a:t>
+            </a:r>
+          </a:p>
+          <a:p>
+            <a:pPr>
+              <a:spcAft>
+                <a:spcPts val="900"/>
+              </a:spcAft>
+            </a:pPr>
             <a:r>
               <a:rPr sz="1600" b="1" i="0">
                 <a:solidFill>
+                  <a:srgbClr val="F2B705"/>
+                </a:solidFill>
+                <a:latin typeface="Malgun Gothic"/>
+                <a:ea typeface="Malgun Gothic"/>
+                <a:cs typeface="Malgun Gothic"/>
+              </a:rPr>
+              <a:t>•  </a:t>
+            </a:r>
+            <a:r>
+              <a:rPr sz="1600" b="0" i="0">
+                <a:solidFill>
+                  <a:srgbClr val="11202B"/>
+                </a:solidFill>
+                <a:latin typeface="Malgun Gothic"/>
+                <a:ea typeface="Malgun Gothic"/>
+                <a:cs typeface="Malgun Gothic"/>
+              </a:rPr>
+              <a:t>3. </a:t>
+            </a:r>
+            <a:r>
+              <a:rPr sz="1600" b="1" i="0">
+                <a:solidFill>
                   <a:srgbClr val="11202B"/>
                 </a:solidFill>
                 <a:latin typeface="Malgun Gothic"/>
@@ -14635,11 +14954,40 @@
                 <a:ea typeface="Malgun Gothic"/>
                 <a:cs typeface="Malgun Gothic"/>
               </a:rPr>
-              <a:t>: 근육이 당기는 힘을 움직임으로 바꾼다(M01-W03-L03). 4. </a:t>
-            </a:r>
+              <a:t>: 근육이 당기는 힘을 움직임으로 바꾼다(M01-W03-L03).</a:t>
+            </a:r>
+          </a:p>
+          <a:p>
+            <a:pPr>
+              <a:spcAft>
+                <a:spcPts val="900"/>
+              </a:spcAft>
+            </a:pPr>
             <a:r>
               <a:rPr sz="1600" b="1" i="0">
                 <a:solidFill>
+                  <a:srgbClr val="F2B705"/>
+                </a:solidFill>
+                <a:latin typeface="Malgun Gothic"/>
+                <a:ea typeface="Malgun Gothic"/>
+                <a:cs typeface="Malgun Gothic"/>
+              </a:rPr>
+              <a:t>•  </a:t>
+            </a:r>
+            <a:r>
+              <a:rPr sz="1600" b="0" i="0">
+                <a:solidFill>
+                  <a:srgbClr val="11202B"/>
+                </a:solidFill>
+                <a:latin typeface="Malgun Gothic"/>
+                <a:ea typeface="Malgun Gothic"/>
+                <a:cs typeface="Malgun Gothic"/>
+              </a:rPr>
+              <a:t>4. </a:t>
+            </a:r>
+            <a:r>
+              <a:rPr sz="1600" b="1" i="0">
+                <a:solidFill>
                   <a:srgbClr val="11202B"/>
                 </a:solidFill>
                 <a:latin typeface="Malgun Gothic"/>
@@ -14657,7 +15005,36 @@
                 <a:ea typeface="Malgun Gothic"/>
                 <a:cs typeface="Malgun Gothic"/>
               </a:rPr>
-              <a:t>: 몸 칼슘의 약 99%와 인의 약 85%가 뼈에 있다. 혈중 농도를 유지하기 위한 창고다. 5. </a:t>
+              <a:t>: 몸 칼슘의 약 99%와 인의 약 85%가 뼈에 있다. 혈중 농도를 유지하기 위한 창고다.</a:t>
+            </a:r>
+          </a:p>
+          <a:p>
+            <a:pPr>
+              <a:spcAft>
+                <a:spcPts val="900"/>
+              </a:spcAft>
+            </a:pPr>
+            <a:r>
+              <a:rPr sz="1600" b="1" i="0">
+                <a:solidFill>
+                  <a:srgbClr val="F2B705"/>
+                </a:solidFill>
+                <a:latin typeface="Malgun Gothic"/>
+                <a:ea typeface="Malgun Gothic"/>
+                <a:cs typeface="Malgun Gothic"/>
+              </a:rPr>
+              <a:t>•  </a:t>
+            </a:r>
+            <a:r>
+              <a:rPr sz="1600" b="0" i="0">
+                <a:solidFill>
+                  <a:srgbClr val="11202B"/>
+                </a:solidFill>
+                <a:latin typeface="Malgun Gothic"/>
+                <a:ea typeface="Malgun Gothic"/>
+                <a:cs typeface="Malgun Gothic"/>
+              </a:rPr>
+              <a:t>5. </a:t>
             </a:r>
             <a:r>
               <a:rPr sz="1600" b="1" i="0">

--- a/curriculum/M01/W04/L01/slides.pptx
+++ b/curriculum/M01/W04/L01/slides.pptx
@@ -13919,7 +13919,7 @@
                 <a:ea typeface="Malgun Gothic"/>
                 <a:cs typeface="Malgun Gothic"/>
               </a:rPr>
-              <a:t>M01-W02-L02 내분비계 요약 — PTH, vitamin D, 칼슘 항상성</a:t>
+              <a:t>M01-W02-L02 내분비계 요약: 호르몬과 되먹임 — PTH, vitamin D, 칼슘 항상성</a:t>
             </a:r>
           </a:p>
           <a:p>
@@ -13948,7 +13948,7 @@
                 <a:ea typeface="Malgun Gothic"/>
                 <a:cs typeface="Malgun Gothic"/>
               </a:rPr>
-              <a:t>M01-W03-L01 발생 요약 — 중배엽과 신경능, 체절과 사지 발생</a:t>
+              <a:t>M01-W03-L01 발생 요약: 수정·배엽·기관 형성 — 중배엽과 신경능, 체절과 사지 발생</a:t>
             </a:r>
           </a:p>
           <a:p>
@@ -13977,7 +13977,7 @@
                 <a:ea typeface="Malgun Gothic"/>
                 <a:cs typeface="Malgun Gothic"/>
               </a:rPr>
-              <a:t>M01-W03-L03 근육 요약 — 지렛대와 근육이 뼈에 가하는 힘</a:t>
+              <a:t>M01-W03-L03 근육 요약: 근육 유형·수축·운동 — 지렛대와 근육이 뼈에 가하는 힘</a:t>
             </a:r>
           </a:p>
         </p:txBody>
